--- a/architool/Using-Archi.pptx
+++ b/architool/Using-Archi.pptx
@@ -5,10 +5,10 @@
     <p:sldMasterId id="2147483648" r:id="rId4"/>
   </p:sldMasterIdLst>
   <p:notesMasterIdLst>
-    <p:notesMasterId r:id="rId15"/>
+    <p:notesMasterId r:id="rId16"/>
   </p:notesMasterIdLst>
   <p:handoutMasterIdLst>
-    <p:handoutMasterId r:id="rId16"/>
+    <p:handoutMasterId r:id="rId17"/>
   </p:handoutMasterIdLst>
   <p:sldIdLst>
     <p:sldId id="256" r:id="rId5"/>
@@ -21,6 +21,7 @@
     <p:sldId id="261" r:id="rId12"/>
     <p:sldId id="264" r:id="rId13"/>
     <p:sldId id="265" r:id="rId14"/>
+    <p:sldId id="266" r:id="rId15"/>
   </p:sldIdLst>
   <p:sldSz cx="12192000" cy="6858000"/>
   <p:notesSz cx="6858000" cy="9144000"/>
@@ -224,7 +225,7 @@
           <a:p>
             <a:fld id="{9410D272-305C-421E-A9EF-95D63D599B42}" type="datetimeFigureOut">
               <a:rPr lang="en-US" smtClean="0"/>
-              <a:t>9/26/2025</a:t>
+              <a:t>4/9/2026</a:t>
             </a:fld>
             <a:endParaRPr lang="en-US" dirty="0"/>
           </a:p>
@@ -401,7 +402,7 @@
           <a:p>
             <a:fld id="{05E16E63-7886-43BC-8DD4-4F14C3DD7360}" type="datetimeFigureOut">
               <a:rPr lang="en-US" smtClean="0"/>
-              <a:t>9/26/2025</a:t>
+              <a:t>4/9/2026</a:t>
             </a:fld>
             <a:endParaRPr lang="en-US" dirty="0"/>
           </a:p>
@@ -7190,6 +7191,281 @@
     <p:extLst>
       <p:ext uri="{BB962C8B-B14F-4D97-AF65-F5344CB8AC3E}">
         <p14:creationId xmlns:p14="http://schemas.microsoft.com/office/powerpoint/2010/main" val="1144409768"/>
+      </p:ext>
+    </p:extLst>
+  </p:cSld>
+  <p:clrMapOvr>
+    <a:masterClrMapping/>
+  </p:clrMapOvr>
+</p:sld>
+</file>
+
+<file path=ppt/slides/slide11.xml><?xml version="1.0" encoding="utf-8"?>
+<p:sld xmlns:a="http://schemas.openxmlformats.org/drawingml/2006/main" xmlns:r="http://schemas.openxmlformats.org/officeDocument/2006/relationships" xmlns:p="http://schemas.openxmlformats.org/presentationml/2006/main">
+  <p:cSld>
+    <p:spTree>
+      <p:nvGrpSpPr>
+        <p:cNvPr id="1" name=""/>
+        <p:cNvGrpSpPr/>
+        <p:nvPr/>
+      </p:nvGrpSpPr>
+      <p:grpSpPr>
+        <a:xfrm>
+          <a:off x="0" y="0"/>
+          <a:ext cx="0" cy="0"/>
+          <a:chOff x="0" y="0"/>
+          <a:chExt cx="0" cy="0"/>
+        </a:xfrm>
+      </p:grpSpPr>
+      <p:pic>
+        <p:nvPicPr>
+          <p:cNvPr id="1026" name="Picture 2">
+            <a:extLst>
+              <a:ext uri="{FF2B5EF4-FFF2-40B4-BE49-F238E27FC236}">
+                <a16:creationId xmlns:a16="http://schemas.microsoft.com/office/drawing/2014/main" id="{6767048D-F929-199D-D5B7-0AB14A5D6805}"/>
+              </a:ext>
+            </a:extLst>
+          </p:cNvPr>
+          <p:cNvPicPr>
+            <a:picLocks noChangeAspect="1" noChangeArrowheads="1"/>
+          </p:cNvPicPr>
+          <p:nvPr/>
+        </p:nvPicPr>
+        <p:blipFill>
+          <a:blip r:embed="rId2">
+            <a:extLst>
+              <a:ext uri="{28A0092B-C50C-407E-A947-70E740481C1C}">
+                <a14:useLocalDpi xmlns:a14="http://schemas.microsoft.com/office/drawing/2010/main" val="0"/>
+              </a:ext>
+            </a:extLst>
+          </a:blip>
+          <a:srcRect/>
+          <a:stretch>
+            <a:fillRect/>
+          </a:stretch>
+        </p:blipFill>
+        <p:spPr bwMode="auto">
+          <a:xfrm>
+            <a:off x="0" y="25400"/>
+            <a:ext cx="12192000" cy="6805613"/>
+          </a:xfrm>
+          <a:prstGeom prst="rect">
+            <a:avLst/>
+          </a:prstGeom>
+          <a:noFill/>
+          <a:extLst>
+            <a:ext uri="{909E8E84-426E-40DD-AFC4-6F175D3DCCD1}">
+              <a14:hiddenFill xmlns:a14="http://schemas.microsoft.com/office/drawing/2010/main">
+                <a:solidFill>
+                  <a:srgbClr val="FFFFFF"/>
+                </a:solidFill>
+              </a14:hiddenFill>
+            </a:ext>
+          </a:extLst>
+        </p:spPr>
+      </p:pic>
+      <p:pic>
+        <p:nvPicPr>
+          <p:cNvPr id="7" name="Picture 6">
+            <a:extLst>
+              <a:ext uri="{FF2B5EF4-FFF2-40B4-BE49-F238E27FC236}">
+                <a16:creationId xmlns:a16="http://schemas.microsoft.com/office/drawing/2014/main" id="{8F1072C6-831D-E634-92A7-6DDC4CB50F41}"/>
+              </a:ext>
+            </a:extLst>
+          </p:cNvPr>
+          <p:cNvPicPr>
+            <a:picLocks noChangeAspect="1"/>
+          </p:cNvPicPr>
+          <p:nvPr/>
+        </p:nvPicPr>
+        <p:blipFill>
+          <a:blip r:embed="rId3"/>
+          <a:stretch>
+            <a:fillRect/>
+          </a:stretch>
+        </p:blipFill>
+        <p:spPr>
+          <a:xfrm>
+            <a:off x="1227255" y="3907858"/>
+            <a:ext cx="1390817" cy="1414914"/>
+          </a:xfrm>
+          <a:prstGeom prst="roundRect">
+            <a:avLst>
+              <a:gd name="adj" fmla="val 16667"/>
+            </a:avLst>
+          </a:prstGeom>
+          <a:ln>
+            <a:noFill/>
+          </a:ln>
+          <a:effectLst>
+            <a:outerShdw blurRad="76200" dist="38100" dir="7800000" algn="tl" rotWithShape="0">
+              <a:srgbClr val="000000">
+                <a:alpha val="40000"/>
+              </a:srgbClr>
+            </a:outerShdw>
+          </a:effectLst>
+          <a:scene3d>
+            <a:camera prst="orthographicFront"/>
+            <a:lightRig rig="contrasting" dir="t">
+              <a:rot lat="0" lon="0" rev="4200000"/>
+            </a:lightRig>
+          </a:scene3d>
+          <a:sp3d prstMaterial="plastic">
+            <a:bevelT w="381000" h="114300" prst="relaxedInset"/>
+            <a:contourClr>
+              <a:srgbClr val="969696"/>
+            </a:contourClr>
+          </a:sp3d>
+        </p:spPr>
+      </p:pic>
+      <p:pic>
+        <p:nvPicPr>
+          <p:cNvPr id="8" name="Picture 7">
+            <a:extLst>
+              <a:ext uri="{FF2B5EF4-FFF2-40B4-BE49-F238E27FC236}">
+                <a16:creationId xmlns:a16="http://schemas.microsoft.com/office/drawing/2014/main" id="{13B3C9A4-37DE-9FB0-E359-C68DF22CE473}"/>
+              </a:ext>
+            </a:extLst>
+          </p:cNvPr>
+          <p:cNvPicPr>
+            <a:picLocks noChangeAspect="1"/>
+          </p:cNvPicPr>
+          <p:nvPr/>
+        </p:nvPicPr>
+        <p:blipFill>
+          <a:blip r:embed="rId4"/>
+          <a:stretch>
+            <a:fillRect/>
+          </a:stretch>
+        </p:blipFill>
+        <p:spPr>
+          <a:xfrm>
+            <a:off x="3653990" y="3975234"/>
+            <a:ext cx="1293395" cy="1328287"/>
+          </a:xfrm>
+          <a:prstGeom prst="roundRect">
+            <a:avLst>
+              <a:gd name="adj" fmla="val 16667"/>
+            </a:avLst>
+          </a:prstGeom>
+          <a:ln>
+            <a:noFill/>
+          </a:ln>
+          <a:effectLst>
+            <a:outerShdw blurRad="76200" dist="38100" dir="7800000" algn="tl" rotWithShape="0">
+              <a:srgbClr val="000000">
+                <a:alpha val="40000"/>
+              </a:srgbClr>
+            </a:outerShdw>
+          </a:effectLst>
+          <a:scene3d>
+            <a:camera prst="orthographicFront"/>
+            <a:lightRig rig="contrasting" dir="t">
+              <a:rot lat="0" lon="0" rev="4200000"/>
+            </a:lightRig>
+          </a:scene3d>
+          <a:sp3d prstMaterial="plastic">
+            <a:bevelT w="381000" h="114300" prst="relaxedInset"/>
+            <a:contourClr>
+              <a:srgbClr val="969696"/>
+            </a:contourClr>
+          </a:sp3d>
+        </p:spPr>
+      </p:pic>
+      <p:pic>
+        <p:nvPicPr>
+          <p:cNvPr id="9" name="Picture 8">
+            <a:extLst>
+              <a:ext uri="{FF2B5EF4-FFF2-40B4-BE49-F238E27FC236}">
+                <a16:creationId xmlns:a16="http://schemas.microsoft.com/office/drawing/2014/main" id="{BC564FC3-5DA1-7813-9054-EE177AF06BD3}"/>
+              </a:ext>
+            </a:extLst>
+          </p:cNvPr>
+          <p:cNvPicPr>
+            <a:picLocks noChangeAspect="1"/>
+          </p:cNvPicPr>
+          <p:nvPr/>
+        </p:nvPicPr>
+        <p:blipFill>
+          <a:blip r:embed="rId5"/>
+          <a:stretch>
+            <a:fillRect/>
+          </a:stretch>
+        </p:blipFill>
+        <p:spPr>
+          <a:xfrm>
+            <a:off x="7124299" y="3859731"/>
+            <a:ext cx="1524000" cy="1572127"/>
+          </a:xfrm>
+          <a:prstGeom prst="rect">
+            <a:avLst/>
+          </a:prstGeom>
+        </p:spPr>
+      </p:pic>
+      <p:pic>
+        <p:nvPicPr>
+          <p:cNvPr id="10" name="Picture 9">
+            <a:extLst>
+              <a:ext uri="{FF2B5EF4-FFF2-40B4-BE49-F238E27FC236}">
+                <a16:creationId xmlns:a16="http://schemas.microsoft.com/office/drawing/2014/main" id="{207CF269-9954-3FEF-6A5F-8FEDC936149A}"/>
+              </a:ext>
+            </a:extLst>
+          </p:cNvPr>
+          <p:cNvPicPr>
+            <a:picLocks noChangeAspect="1"/>
+          </p:cNvPicPr>
+          <p:nvPr/>
+        </p:nvPicPr>
+        <p:blipFill>
+          <a:blip r:embed="rId6"/>
+          <a:stretch>
+            <a:fillRect/>
+          </a:stretch>
+        </p:blipFill>
+        <p:spPr>
+          <a:xfrm>
+            <a:off x="9674994" y="4471771"/>
+            <a:ext cx="1345932" cy="330967"/>
+          </a:xfrm>
+          <a:prstGeom prst="roundRect">
+            <a:avLst>
+              <a:gd name="adj" fmla="val 16667"/>
+            </a:avLst>
+          </a:prstGeom>
+          <a:solidFill>
+            <a:schemeClr val="accent2">
+              <a:lumMod val="40000"/>
+              <a:lumOff val="60000"/>
+            </a:schemeClr>
+          </a:solidFill>
+          <a:ln>
+            <a:noFill/>
+          </a:ln>
+          <a:effectLst>
+            <a:outerShdw blurRad="76200" dist="38100" dir="7800000" algn="tl" rotWithShape="0">
+              <a:srgbClr val="000000">
+                <a:alpha val="40000"/>
+              </a:srgbClr>
+            </a:outerShdw>
+          </a:effectLst>
+          <a:scene3d>
+            <a:camera prst="orthographicFront"/>
+            <a:lightRig rig="contrasting" dir="t">
+              <a:rot lat="0" lon="0" rev="4200000"/>
+            </a:lightRig>
+          </a:scene3d>
+          <a:sp3d prstMaterial="plastic">
+            <a:bevelT w="381000" h="114300" prst="relaxedInset"/>
+            <a:contourClr>
+              <a:srgbClr val="969696"/>
+            </a:contourClr>
+          </a:sp3d>
+        </p:spPr>
+      </p:pic>
+    </p:spTree>
+    <p:extLst>
+      <p:ext uri="{BB962C8B-B14F-4D97-AF65-F5344CB8AC3E}">
+        <p14:creationId xmlns:p14="http://schemas.microsoft.com/office/powerpoint/2010/main" val="3318490066"/>
       </p:ext>
     </p:extLst>
   </p:cSld>
@@ -11870,6 +12146,15 @@
 </file>
 
 <file path=customXml/item2.xml><?xml version="1.0" encoding="utf-8"?>
+<?mso-contentType ?>
+<FormTemplates xmlns="http://schemas.microsoft.com/sharepoint/v3/contenttype/forms">
+  <Display>DocumentLibraryForm</Display>
+  <Edit>DocumentLibraryForm</Edit>
+  <New>DocumentLibraryForm</New>
+</FormTemplates>
+</file>
+
+<file path=customXml/item3.xml><?xml version="1.0" encoding="utf-8"?>
 <p:properties xmlns:p="http://schemas.microsoft.com/office/2006/metadata/properties" xmlns:xsi="http://www.w3.org/2001/XMLSchema-instance" xmlns:pc="http://schemas.microsoft.com/office/infopath/2007/PartnerControls">
   <documentManagement>
     <Status xmlns="71af3243-3dd4-4a8d-8c0d-dd76da1f02a5">Not started</Status>
@@ -11886,15 +12171,6 @@
     <MediaServiceKeyPoints xmlns="71af3243-3dd4-4a8d-8c0d-dd76da1f02a5" xsi:nil="true"/>
   </documentManagement>
 </p:properties>
-</file>
-
-<file path=customXml/item3.xml><?xml version="1.0" encoding="utf-8"?>
-<?mso-contentType ?>
-<FormTemplates xmlns="http://schemas.microsoft.com/sharepoint/v3/contenttype/forms">
-  <Display>DocumentLibraryForm</Display>
-  <Edit>DocumentLibraryForm</Edit>
-  <New>DocumentLibraryForm</New>
-</FormTemplates>
 </file>
 
 <file path=customXml/itemProps1.xml><?xml version="1.0" encoding="utf-8"?>
@@ -11919,6 +12195,14 @@
 </file>
 
 <file path=customXml/itemProps2.xml><?xml version="1.0" encoding="utf-8"?>
+<ds:datastoreItem xmlns:ds="http://schemas.openxmlformats.org/officeDocument/2006/customXml" ds:itemID="{A5CCB28C-7D26-4A36-9CFC-D739C28F3D18}">
+  <ds:schemaRefs>
+    <ds:schemaRef ds:uri="http://schemas.microsoft.com/sharepoint/v3/contenttype/forms"/>
+  </ds:schemaRefs>
+</ds:datastoreItem>
+</file>
+
+<file path=customXml/itemProps3.xml><?xml version="1.0" encoding="utf-8"?>
 <ds:datastoreItem xmlns:ds="http://schemas.openxmlformats.org/officeDocument/2006/customXml" ds:itemID="{08757C30-AE9A-4680-90EB-19D282EC2B7C}">
   <ds:schemaRefs>
     <ds:schemaRef ds:uri="http://schemas.microsoft.com/office/2006/metadata/properties"/>
@@ -11930,16 +12214,9 @@
 </ds:datastoreItem>
 </file>
 
-<file path=customXml/itemProps3.xml><?xml version="1.0" encoding="utf-8"?>
-<ds:datastoreItem xmlns:ds="http://schemas.openxmlformats.org/officeDocument/2006/customXml" ds:itemID="{A5CCB28C-7D26-4A36-9CFC-D739C28F3D18}">
-  <ds:schemaRefs>
-    <ds:schemaRef ds:uri="http://schemas.microsoft.com/sharepoint/v3/contenttype/forms"/>
-  </ds:schemaRefs>
-</ds:datastoreItem>
-</file>
-
 <file path=docMetadata/LabelInfo.xml><?xml version="1.0" encoding="utf-8"?>
 <clbl:labelList xmlns:clbl="http://schemas.microsoft.com/office/2020/mipLabelMetadata">
+  <clbl:label id="{19540963-e559-4020-8a90-fe8a502c2801}" enabled="1" method="Standard" siteId="{f25493ae-1c98-41d7-8a33-0be75f5fe603}" contentBits="0" removed="0"/>
   <clbl:label id="{f42aa342-8706-4288-bd11-ebb85995028c}" enabled="1" method="Standard" siteId="{72f988bf-86f1-41af-91ab-2d7cd011db47}" contentBits="0" removed="0"/>
 </clbl:labelList>
 </file>